--- a/assets/powerpoints/module-activite/D2-deux-facons-de-dire-la-meme-chose.pptx
+++ b/assets/powerpoints/module-activite/D2-deux-facons-de-dire-la-meme-chose.pptx
@@ -12700,7 +12700,25 @@
                 </a:solidFill>
                 <a:latin typeface="Verdana"/>
               </a:rPr>
-              <a:t>Dans le doute, employez &lt;b&gt;vous&lt;/b&gt;. Personne n'a jamais été vexé d'être vouvoyé. Et si un moniteur vous tutoie, vous n'êtes pas obligé de le tutoyer en retour — le tutoiement n'est pas toujours réciproque.</a:t>
+              <a:t>Dans le doute, employez </a:t>
+            </a:r>
+            <a:r>
+              <a:rPr sz="2000" b="1" i="0">
+                <a:solidFill>
+                  <a:srgbClr val="4B4F52"/>
+                </a:solidFill>
+                <a:latin typeface="Verdana"/>
+              </a:rPr>
+              <a:t>vous</a:t>
+            </a:r>
+            <a:r>
+              <a:rPr sz="2000" b="0" i="0">
+                <a:solidFill>
+                  <a:srgbClr val="4B4F52"/>
+                </a:solidFill>
+                <a:latin typeface="Verdana"/>
+              </a:rPr>
+              <a:t>. Personne n'a jamais été vexé d'être vouvoyé. Et si un moniteur vous tutoie, vous n'êtes pas obligé de le tutoyer en retour — le tutoiement n'est pas toujours réciproque.</a:t>
             </a:r>
           </a:p>
         </p:txBody>
